--- a/lecture_pptx/out/s17/ワーク02_講師用.pptx
+++ b/lecture_pptx/out/s17/ワーク02_講師用.pptx
@@ -1106,7 +1106,7 @@
                 <a:ea typeface="Yu Gothic UI Semibold" pitchFamily="34" charset="-122"/>
                 <a:cs typeface="Yu Gothic UI Semibold" pitchFamily="34" charset="-120"/>
               </a:rPr>
-              <a:t>ヒアリングのフォーム化</a:t>
+              <a:t>GAS + Gemini で ライフプランAI を実装</a:t>
             </a:r>
             <a:endParaRPr lang="en-US" sz="3800" dirty="0"/>
           </a:p>
@@ -1145,7 +1145,7 @@
                 <a:ea typeface="Yu Gothic UI" pitchFamily="34" charset="-122"/>
                 <a:cs typeface="Yu Gothic UI" pitchFamily="34" charset="-120"/>
               </a:rPr>
-              <a:t>商談前にAIヒアリングを完了させ、商談は提案に集中</a:t>
+              <a:t>顧客カルテを埋めて "実行" ボタン → 30秒で40年CF+保険提案フックが出るツールをバイブコーディング</a:t>
             </a:r>
             <a:endParaRPr lang="en-US" sz="1900" dirty="0"/>
           </a:p>
@@ -1275,7 +1275,7 @@
                 <a:ea typeface="Yu Gothic UI Semibold" pitchFamily="34" charset="-122"/>
                 <a:cs typeface="Yu Gothic UI Semibold" pitchFamily="34" charset="-120"/>
               </a:rPr>
-              <a:t>演習1 ヒアリングのフォーム化 — 解答・指導ポイント</a:t>
+              <a:t>演習1 GAS で 入力→Gemini→スプシ書出 を実装 — 解答・指導ポイント</a:t>
             </a:r>
             <a:endParaRPr lang="en-US" sz="2600" dirty="0"/>
           </a:p>
@@ -1442,107 +1442,176 @@
                 <a:ea typeface="Yu Gothic UI" pitchFamily="34" charset="-122"/>
                 <a:cs typeface="Yu Gothic UI" pitchFamily="34" charset="-120"/>
               </a:rPr>
-              <a:t>【貼り付け用】</a:t>
-            </a:r>
-            <a:endParaRPr lang="en-US" sz="1400" dirty="0"/>
-          </a:p>
-          <a:p>
-            <a:pPr indent="0" marL="0">
-              <a:spcAft>
-                <a:spcPts val="400"/>
-              </a:spcAft>
-              <a:buNone/>
-            </a:pPr>
-            <a:r>
-              <a:rPr lang="en-US" sz="1400" dirty="0">
-                <a:solidFill>
-                  <a:srgbClr val="1A1A1A"/>
-                </a:solidFill>
-                <a:latin typeface="Yu Gothic UI" pitchFamily="34" charset="0"/>
-                <a:ea typeface="Yu Gothic UI" pitchFamily="34" charset="-122"/>
-                <a:cs typeface="Yu Gothic UI" pitchFamily="34" charset="-120"/>
-              </a:rPr>
-              <a:t>上の30項目ヒアリングを Google フォーム用に20問に編成して。</a:t>
-            </a:r>
-            <a:endParaRPr lang="en-US" sz="1400" dirty="0"/>
-          </a:p>
-          <a:p>
-            <a:pPr indent="0" marL="0">
-              <a:spcAft>
-                <a:spcPts val="400"/>
-              </a:spcAft>
-              <a:buNone/>
-            </a:pPr>
-            <a:r>
-              <a:rPr lang="en-US" sz="1400" dirty="0">
-                <a:solidFill>
-                  <a:srgbClr val="1A1A1A"/>
-                </a:solidFill>
-                <a:latin typeface="Yu Gothic UI" pitchFamily="34" charset="0"/>
-                <a:ea typeface="Yu Gothic UI" pitchFamily="34" charset="-122"/>
-                <a:cs typeface="Yu Gothic UI" pitchFamily="34" charset="-120"/>
-              </a:rPr>
-              <a:t>・所要時間目安を冒頭に</a:t>
-            </a:r>
-            <a:endParaRPr lang="en-US" sz="1400" dirty="0"/>
-          </a:p>
-          <a:p>
-            <a:pPr indent="0" marL="0">
-              <a:spcAft>
-                <a:spcPts val="400"/>
-              </a:spcAft>
-              <a:buNone/>
-            </a:pPr>
-            <a:r>
-              <a:rPr lang="en-US" sz="1400" dirty="0">
-                <a:solidFill>
-                  <a:srgbClr val="1A1A1A"/>
-                </a:solidFill>
-                <a:latin typeface="Yu Gothic UI" pitchFamily="34" charset="0"/>
-                <a:ea typeface="Yu Gothic UI" pitchFamily="34" charset="-122"/>
-                <a:cs typeface="Yu Gothic UI" pitchFamily="34" charset="-120"/>
-              </a:rPr>
-              <a:t>・セクション分け(2-3画面)</a:t>
-            </a:r>
-            <a:endParaRPr lang="en-US" sz="1400" dirty="0"/>
-          </a:p>
-          <a:p>
-            <a:pPr indent="0" marL="0">
-              <a:spcAft>
-                <a:spcPts val="400"/>
-              </a:spcAft>
-              <a:buNone/>
-            </a:pPr>
-            <a:r>
-              <a:rPr lang="en-US" sz="1400" dirty="0">
-                <a:solidFill>
-                  <a:srgbClr val="1A1A1A"/>
-                </a:solidFill>
-                <a:latin typeface="Yu Gothic UI" pitchFamily="34" charset="0"/>
-                <a:ea typeface="Yu Gothic UI" pitchFamily="34" charset="-122"/>
-                <a:cs typeface="Yu Gothic UI" pitchFamily="34" charset="-120"/>
-              </a:rPr>
-              <a:t>・必須/任意を明確化</a:t>
-            </a:r>
-            <a:endParaRPr lang="en-US" sz="1400" dirty="0"/>
-          </a:p>
-          <a:p>
-            <a:pPr indent="0" marL="0">
-              <a:spcAft>
-                <a:spcPts val="400"/>
-              </a:spcAft>
-              <a:buNone/>
-            </a:pPr>
-            <a:r>
-              <a:rPr lang="en-US" sz="1400" dirty="0">
-                <a:solidFill>
-                  <a:srgbClr val="1A1A1A"/>
-                </a:solidFill>
-                <a:latin typeface="Yu Gothic UI" pitchFamily="34" charset="0"/>
-                <a:ea typeface="Yu Gothic UI" pitchFamily="34" charset="-122"/>
-                <a:cs typeface="Yu Gothic UI" pitchFamily="34" charset="-120"/>
-              </a:rPr>
-              <a:t>・冒頭あいさつ+送信後サンクスメッセージ</a:t>
+              <a:t>【生徒への声かけ例】</a:t>
+            </a:r>
+            <a:endParaRPr lang="en-US" sz="1400" dirty="0"/>
+          </a:p>
+          <a:p>
+            <a:pPr indent="0" marL="0">
+              <a:spcAft>
+                <a:spcPts val="400"/>
+              </a:spcAft>
+              <a:buNone/>
+            </a:pPr>
+            <a:r>
+              <a:rPr lang="en-US" sz="1400" dirty="0">
+                <a:solidFill>
+                  <a:srgbClr val="1A1A1A"/>
+                </a:solidFill>
+                <a:latin typeface="Yu Gothic UI" pitchFamily="34" charset="0"/>
+                <a:ea typeface="Yu Gothic UI" pitchFamily="34" charset="-122"/>
+                <a:cs typeface="Yu Gothic UI" pitchFamily="34" charset="-120"/>
+              </a:rPr>
+              <a:t>・「セットアップ手順_GASライフプランAI.md を見ながら、まず testSetup が通ることを目指して」</a:t>
+            </a:r>
+            <a:endParaRPr lang="en-US" sz="1400" dirty="0"/>
+          </a:p>
+          <a:p>
+            <a:pPr indent="0" marL="0">
+              <a:spcAft>
+                <a:spcPts val="400"/>
+              </a:spcAft>
+              <a:buNone/>
+            </a:pPr>
+            <a:r>
+              <a:rPr lang="en-US" sz="1400" dirty="0">
+                <a:solidFill>
+                  <a:srgbClr val="1A1A1A"/>
+                </a:solidFill>
+                <a:latin typeface="Yu Gothic UI" pitchFamily="34" charset="0"/>
+                <a:ea typeface="Yu Gothic UI" pitchFamily="34" charset="-122"/>
+                <a:cs typeface="Yu Gothic UI" pitchFamily="34" charset="-120"/>
+              </a:rPr>
+              <a:t>・「エラーが出たら 慌てず Logger のログを見る(GASエディタ下部)」</a:t>
+            </a:r>
+            <a:endParaRPr lang="en-US" sz="1400" dirty="0"/>
+          </a:p>
+          <a:p>
+            <a:pPr indent="0" marL="0">
+              <a:spcAft>
+                <a:spcPts val="400"/>
+              </a:spcAft>
+              <a:buNone/>
+            </a:pPr>
+            <a:r>
+              <a:rPr lang="en-US" sz="1400" dirty="0">
+                <a:solidFill>
+                  <a:srgbClr val="1A1A1A"/>
+                </a:solidFill>
+                <a:latin typeface="Yu Gothic UI" pitchFamily="34" charset="0"/>
+                <a:ea typeface="Yu Gothic UI" pitchFamily="34" charset="-122"/>
+                <a:cs typeface="Yu Gothic UI" pitchFamily="34" charset="-120"/>
+              </a:rPr>
+              <a:t>・「Sidebar.html は 実行状況を見るためのおまけ、メインは Code_ライフプランAI.gs」</a:t>
+            </a:r>
+            <a:endParaRPr lang="en-US" sz="1400" dirty="0"/>
+          </a:p>
+          <a:p>
+            <a:pPr indent="0" marL="0">
+              <a:spcAft>
+                <a:spcPts val="400"/>
+              </a:spcAft>
+              <a:buNone/>
+            </a:pPr>
+            <a:endParaRPr lang="en-US" sz="1400" dirty="0"/>
+          </a:p>
+          <a:p>
+            <a:pPr indent="0" marL="0">
+              <a:spcAft>
+                <a:spcPts val="400"/>
+              </a:spcAft>
+              <a:buNone/>
+            </a:pPr>
+            <a:r>
+              <a:rPr lang="en-US" sz="1400" dirty="0">
+                <a:solidFill>
+                  <a:srgbClr val="1A1A1A"/>
+                </a:solidFill>
+                <a:latin typeface="Yu Gothic UI" pitchFamily="34" charset="0"/>
+                <a:ea typeface="Yu Gothic UI" pitchFamily="34" charset="-122"/>
+                <a:cs typeface="Yu Gothic UI" pitchFamily="34" charset="-120"/>
+              </a:rPr>
+              <a:t>【生徒が Gemini に投げる相談例(バイブコーディング)】</a:t>
+            </a:r>
+            <a:endParaRPr lang="en-US" sz="1400" dirty="0"/>
+          </a:p>
+          <a:p>
+            <a:pPr indent="0" marL="0">
+              <a:spcAft>
+                <a:spcPts val="400"/>
+              </a:spcAft>
+              <a:buNone/>
+            </a:pPr>
+            <a:r>
+              <a:rPr lang="en-US" sz="1400" dirty="0">
+                <a:solidFill>
+                  <a:srgbClr val="1A1A1A"/>
+                </a:solidFill>
+                <a:latin typeface="Yu Gothic UI" pitchFamily="34" charset="0"/>
+                <a:ea typeface="Yu Gothic UI" pitchFamily="34" charset="-122"/>
+                <a:cs typeface="Yu Gothic UI" pitchFamily="34" charset="-120"/>
+              </a:rPr>
+              <a:t>「Google Apps Script で、以下のスプシから顧客カルテを読み込み、Gemini API に投げて </a:t>
+            </a:r>
+            <a:endParaRPr lang="en-US" sz="1400" dirty="0"/>
+          </a:p>
+          <a:p>
+            <a:pPr indent="0" marL="0">
+              <a:spcAft>
+                <a:spcPts val="400"/>
+              </a:spcAft>
+              <a:buNone/>
+            </a:pPr>
+            <a:r>
+              <a:rPr lang="en-US" sz="1400" dirty="0">
+                <a:solidFill>
+                  <a:srgbClr val="1A1A1A"/>
+                </a:solidFill>
+                <a:latin typeface="Yu Gothic UI" pitchFamily="34" charset="0"/>
+                <a:ea typeface="Yu Gothic UI" pitchFamily="34" charset="-122"/>
+                <a:cs typeface="Yu Gothic UI" pitchFamily="34" charset="-120"/>
+              </a:rPr>
+              <a:t> 40年ぶんのCF表 + サマリ + 保険提案フック を JSON で返させ、</a:t>
+            </a:r>
+            <a:endParaRPr lang="en-US" sz="1400" dirty="0"/>
+          </a:p>
+          <a:p>
+            <a:pPr indent="0" marL="0">
+              <a:spcAft>
+                <a:spcPts val="400"/>
+              </a:spcAft>
+              <a:buNone/>
+            </a:pPr>
+            <a:r>
+              <a:rPr lang="en-US" sz="1400" dirty="0">
+                <a:solidFill>
+                  <a:srgbClr val="1A1A1A"/>
+                </a:solidFill>
+                <a:latin typeface="Yu Gothic UI" pitchFamily="34" charset="0"/>
+                <a:ea typeface="Yu Gothic UI" pitchFamily="34" charset="-122"/>
+                <a:cs typeface="Yu Gothic UI" pitchFamily="34" charset="-120"/>
+              </a:rPr>
+              <a:t> 別シートに書き出す関数を書いて。responseSchema で構造化強制。</a:t>
+            </a:r>
+            <a:endParaRPr lang="en-US" sz="1400" dirty="0"/>
+          </a:p>
+          <a:p>
+            <a:pPr indent="0" marL="0">
+              <a:spcAft>
+                <a:spcPts val="400"/>
+              </a:spcAft>
+              <a:buNone/>
+            </a:pPr>
+            <a:r>
+              <a:rPr lang="en-US" sz="1400" dirty="0">
+                <a:solidFill>
+                  <a:srgbClr val="1A1A1A"/>
+                </a:solidFill>
+                <a:latin typeface="Yu Gothic UI" pitchFamily="34" charset="0"/>
+                <a:ea typeface="Yu Gothic UI" pitchFamily="34" charset="-122"/>
+                <a:cs typeface="Yu Gothic UI" pitchFamily="34" charset="-120"/>
+              </a:rPr>
+              <a:t> 顧客カルテのシート構造: [ここに項目一覧を貼付]」</a:t>
             </a:r>
             <a:endParaRPr lang="en-US" sz="1400" dirty="0"/>
           </a:p>
@@ -1670,7 +1739,67 @@
                 <a:ea typeface="Yu Gothic UI" pitchFamily="34" charset="-122"/>
                 <a:cs typeface="Yu Gothic UI" pitchFamily="34" charset="-120"/>
               </a:rPr>
-              <a:t>・Google フォーム設計書(20問+セクション分け)</a:t>
+              <a:t>・testSetup が全項目 OK</a:t>
+            </a:r>
+            <a:endParaRPr lang="en-US" sz="1400" dirty="0"/>
+          </a:p>
+          <a:p>
+            <a:pPr indent="0" marL="0">
+              <a:spcAft>
+                <a:spcPts val="400"/>
+              </a:spcAft>
+              <a:buNone/>
+            </a:pPr>
+            <a:r>
+              <a:rPr lang="en-US" sz="1400" dirty="0">
+                <a:solidFill>
+                  <a:srgbClr val="1A1A1A"/>
+                </a:solidFill>
+                <a:latin typeface="Yu Gothic UI" pitchFamily="34" charset="0"/>
+                <a:ea typeface="Yu Gothic UI" pitchFamily="34" charset="-122"/>
+                <a:cs typeface="Yu Gothic UI" pitchFamily="34" charset="-120"/>
+              </a:rPr>
+              <a:t>・記入例で シミュレーション実行が完走</a:t>
+            </a:r>
+            <a:endParaRPr lang="en-US" sz="1400" dirty="0"/>
+          </a:p>
+          <a:p>
+            <a:pPr indent="0" marL="0">
+              <a:spcAft>
+                <a:spcPts val="400"/>
+              </a:spcAft>
+              <a:buNone/>
+            </a:pPr>
+            <a:r>
+              <a:rPr lang="en-US" sz="1400" dirty="0">
+                <a:solidFill>
+                  <a:srgbClr val="1A1A1A"/>
+                </a:solidFill>
+                <a:latin typeface="Yu Gothic UI" pitchFamily="34" charset="0"/>
+                <a:ea typeface="Yu Gothic UI" pitchFamily="34" charset="-122"/>
+                <a:cs typeface="Yu Gothic UI" pitchFamily="34" charset="-120"/>
+              </a:rPr>
+              <a:t>・シミュレーション結果シートに CF表 40行 + サマリ + グラフ が出る</a:t>
+            </a:r>
+            <a:endParaRPr lang="en-US" sz="1400" dirty="0"/>
+          </a:p>
+          <a:p>
+            <a:pPr indent="0" marL="0">
+              <a:spcAft>
+                <a:spcPts val="400"/>
+              </a:spcAft>
+              <a:buNone/>
+            </a:pPr>
+            <a:r>
+              <a:rPr lang="en-US" sz="1400" dirty="0">
+                <a:solidFill>
+                  <a:srgbClr val="1A1A1A"/>
+                </a:solidFill>
+                <a:latin typeface="Yu Gothic UI" pitchFamily="34" charset="0"/>
+                <a:ea typeface="Yu Gothic UI" pitchFamily="34" charset="-122"/>
+                <a:cs typeface="Yu Gothic UI" pitchFamily="34" charset="-120"/>
+              </a:rPr>
+              <a:t>・保険提案フックシートに 3〜5件の提案候補が出る</a:t>
             </a:r>
             <a:endParaRPr lang="en-US" sz="1400" dirty="0"/>
           </a:p>
@@ -1798,47 +1927,67 @@
                 <a:ea typeface="Yu Gothic UI" pitchFamily="34" charset="-122"/>
                 <a:cs typeface="Yu Gothic UI" pitchFamily="34" charset="-120"/>
               </a:rPr>
-              <a:t>・30→20の絞り込みで悩む。「同じ目的の質問は1つに」を指針に。</a:t>
-            </a:r>
-            <a:endParaRPr lang="en-US" sz="1400" dirty="0"/>
-          </a:p>
-          <a:p>
-            <a:pPr indent="0" marL="0">
-              <a:spcAft>
-                <a:spcPts val="400"/>
-              </a:spcAft>
-              <a:buNone/>
-            </a:pPr>
-            <a:r>
-              <a:rPr lang="en-US" sz="1400" dirty="0">
-                <a:solidFill>
-                  <a:srgbClr val="1A1A1A"/>
-                </a:solidFill>
-                <a:latin typeface="Yu Gothic UI" pitchFamily="34" charset="0"/>
-                <a:ea typeface="Yu Gothic UI" pitchFamily="34" charset="-122"/>
-                <a:cs typeface="Yu Gothic UI" pitchFamily="34" charset="-120"/>
-              </a:rPr>
-              <a:t>・自由記述を多用しないよう注意。選択式優先。</a:t>
-            </a:r>
-            <a:endParaRPr lang="en-US" sz="1400" dirty="0"/>
-          </a:p>
-          <a:p>
-            <a:pPr indent="0" marL="0">
-              <a:spcAft>
-                <a:spcPts val="400"/>
-              </a:spcAft>
-              <a:buNone/>
-            </a:pPr>
-            <a:r>
-              <a:rPr lang="en-US" sz="1400" dirty="0">
-                <a:solidFill>
-                  <a:srgbClr val="1A1A1A"/>
-                </a:solidFill>
-                <a:latin typeface="Yu Gothic UI" pitchFamily="34" charset="0"/>
-                <a:ea typeface="Yu Gothic UI" pitchFamily="34" charset="-122"/>
-                <a:cs typeface="Yu Gothic UI" pitchFamily="34" charset="-120"/>
-              </a:rPr>
-              <a:t>・モバイル回答前提でレイアウトを確認。</a:t>
+              <a:t>・バイブコーディングは "AI に全部書かせて 動かない箇所だけ直す" スタイル。</a:t>
+            </a:r>
+            <a:endParaRPr lang="en-US" sz="1400" dirty="0"/>
+          </a:p>
+          <a:p>
+            <a:pPr indent="0" marL="0">
+              <a:spcAft>
+                <a:spcPts val="400"/>
+              </a:spcAft>
+              <a:buNone/>
+            </a:pPr>
+            <a:r>
+              <a:rPr lang="en-US" sz="1400" dirty="0">
+                <a:solidFill>
+                  <a:srgbClr val="1A1A1A"/>
+                </a:solidFill>
+                <a:latin typeface="Yu Gothic UI" pitchFamily="34" charset="0"/>
+                <a:ea typeface="Yu Gothic UI" pitchFamily="34" charset="-122"/>
+                <a:cs typeface="Yu Gothic UI" pitchFamily="34" charset="-120"/>
+              </a:rPr>
+              <a:t>・コード全読解を求めない。動作原理は理解、詳細は「困った時に読む」でOK。</a:t>
+            </a:r>
+            <a:endParaRPr lang="en-US" sz="1400" dirty="0"/>
+          </a:p>
+          <a:p>
+            <a:pPr indent="0" marL="0">
+              <a:spcAft>
+                <a:spcPts val="400"/>
+              </a:spcAft>
+              <a:buNone/>
+            </a:pPr>
+            <a:r>
+              <a:rPr lang="en-US" sz="1400" dirty="0">
+                <a:solidFill>
+                  <a:srgbClr val="1A1A1A"/>
+                </a:solidFill>
+                <a:latin typeface="Yu Gothic UI" pitchFamily="34" charset="0"/>
+                <a:ea typeface="Yu Gothic UI" pitchFamily="34" charset="-122"/>
+                <a:cs typeface="Yu Gothic UI" pitchFamily="34" charset="-120"/>
+              </a:rPr>
+              <a:t>・API キー漏洩を絶対に防ぐ。スクリプトプロパティ経由を徹底、コード直書きは NG。</a:t>
+            </a:r>
+            <a:endParaRPr lang="en-US" sz="1400" dirty="0"/>
+          </a:p>
+          <a:p>
+            <a:pPr indent="0" marL="0">
+              <a:spcAft>
+                <a:spcPts val="400"/>
+              </a:spcAft>
+              <a:buNone/>
+            </a:pPr>
+            <a:r>
+              <a:rPr lang="en-US" sz="1400" dirty="0">
+                <a:solidFill>
+                  <a:srgbClr val="1A1A1A"/>
+                </a:solidFill>
+                <a:latin typeface="Yu Gothic UI" pitchFamily="34" charset="0"/>
+                <a:ea typeface="Yu Gothic UI" pitchFamily="34" charset="-122"/>
+                <a:cs typeface="Yu Gothic UI" pitchFamily="34" charset="-120"/>
+              </a:rPr>
+              <a:t>・生徒が詰まったら 「セットアップ手順.md のトラブルシューティング表」を先に見せる。</a:t>
             </a:r>
             <a:endParaRPr lang="en-US" sz="1400" dirty="0"/>
           </a:p>
@@ -1929,7 +2078,7 @@
                 <a:ea typeface="Yu Gothic UI Semibold" pitchFamily="34" charset="-122"/>
                 <a:cs typeface="Yu Gothic UI Semibold" pitchFamily="34" charset="-120"/>
               </a:rPr>
-              <a:t>演習2 フォーム回答→顧客情報シート整理 GAS — 解答・指導ポイント</a:t>
+              <a:t>演習2 3ケース実測 + 運用ルール決定 — 解答・指導ポイント</a:t>
             </a:r>
             <a:endParaRPr lang="en-US" sz="2600" dirty="0"/>
           </a:p>
@@ -2096,107 +2245,176 @@
                 <a:ea typeface="Yu Gothic UI" pitchFamily="34" charset="-122"/>
                 <a:cs typeface="Yu Gothic UI" pitchFamily="34" charset="-120"/>
               </a:rPr>
-              <a:t>【貼り付け用】</a:t>
-            </a:r>
-            <a:endParaRPr lang="en-US" sz="1400" dirty="0"/>
-          </a:p>
-          <a:p>
-            <a:pPr indent="0" marL="0">
-              <a:spcAft>
-                <a:spcPts val="400"/>
-              </a:spcAft>
-              <a:buNone/>
-            </a:pPr>
-            <a:r>
-              <a:rPr lang="en-US" sz="1400" dirty="0">
-                <a:solidFill>
-                  <a:srgbClr val="1A1A1A"/>
-                </a:solidFill>
-                <a:latin typeface="Yu Gothic UI" pitchFamily="34" charset="0"/>
-                <a:ea typeface="Yu Gothic UI" pitchFamily="34" charset="-122"/>
-                <a:cs typeface="Yu Gothic UI" pitchFamily="34" charset="-120"/>
-              </a:rPr>
-              <a:t>Google フォーム回答時に自動実行するGAS を作って。</a:t>
-            </a:r>
-            <a:endParaRPr lang="en-US" sz="1400" dirty="0"/>
-          </a:p>
-          <a:p>
-            <a:pPr indent="0" marL="0">
-              <a:spcAft>
-                <a:spcPts val="400"/>
-              </a:spcAft>
-              <a:buNone/>
-            </a:pPr>
-            <a:r>
-              <a:rPr lang="en-US" sz="1400" dirty="0">
-                <a:solidFill>
-                  <a:srgbClr val="1A1A1A"/>
-                </a:solidFill>
-                <a:latin typeface="Yu Gothic UI" pitchFamily="34" charset="0"/>
-                <a:ea typeface="Yu Gothic UI" pitchFamily="34" charset="-122"/>
-                <a:cs typeface="Yu Gothic UI" pitchFamily="34" charset="-120"/>
-              </a:rPr>
-              <a:t>・onFormSubmit トリガー</a:t>
-            </a:r>
-            <a:endParaRPr lang="en-US" sz="1400" dirty="0"/>
-          </a:p>
-          <a:p>
-            <a:pPr indent="0" marL="0">
-              <a:spcAft>
-                <a:spcPts val="400"/>
-              </a:spcAft>
-              <a:buNone/>
-            </a:pPr>
-            <a:r>
-              <a:rPr lang="en-US" sz="1400" dirty="0">
-                <a:solidFill>
-                  <a:srgbClr val="1A1A1A"/>
-                </a:solidFill>
-                <a:latin typeface="Yu Gothic UI" pitchFamily="34" charset="0"/>
-                <a:ea typeface="Yu Gothic UI" pitchFamily="34" charset="-122"/>
-                <a:cs typeface="Yu Gothic UI" pitchFamily="34" charset="-120"/>
-              </a:rPr>
-              <a:t>・既存顧客(氏名+メール一致)は更新、新規は追加</a:t>
-            </a:r>
-            <a:endParaRPr lang="en-US" sz="1400" dirty="0"/>
-          </a:p>
-          <a:p>
-            <a:pPr indent="0" marL="0">
-              <a:spcAft>
-                <a:spcPts val="400"/>
-              </a:spcAft>
-              <a:buNone/>
-            </a:pPr>
-            <a:r>
-              <a:rPr lang="en-US" sz="1400" dirty="0">
-                <a:solidFill>
-                  <a:srgbClr val="1A1A1A"/>
-                </a:solidFill>
-                <a:latin typeface="Yu Gothic UI" pitchFamily="34" charset="0"/>
-                <a:ea typeface="Yu Gothic UI" pitchFamily="34" charset="-122"/>
-                <a:cs typeface="Yu Gothic UI" pitchFamily="34" charset="-120"/>
-              </a:rPr>
-              <a:t>・記入率20%未満の場合は自分にメール通知</a:t>
-            </a:r>
-            <a:endParaRPr lang="en-US" sz="1400" dirty="0"/>
-          </a:p>
-          <a:p>
-            <a:pPr indent="0" marL="0">
-              <a:spcAft>
-                <a:spcPts val="400"/>
-              </a:spcAft>
-              <a:buNone/>
-            </a:pPr>
-            <a:r>
-              <a:rPr lang="en-US" sz="1400" dirty="0">
-                <a:solidFill>
-                  <a:srgbClr val="1A1A1A"/>
-                </a:solidFill>
-                <a:latin typeface="Yu Gothic UI" pitchFamily="34" charset="0"/>
-                <a:ea typeface="Yu Gothic UI" pitchFamily="34" charset="-122"/>
-                <a:cs typeface="Yu Gothic UI" pitchFamily="34" charset="-120"/>
-              </a:rPr>
-              <a:t>・顧客情報シートの列: ●●●</a:t>
+              <a:t>【3ケース実測の流れ】</a:t>
+            </a:r>
+            <a:endParaRPr lang="en-US" sz="1400" dirty="0"/>
+          </a:p>
+          <a:p>
+            <a:pPr indent="0" marL="0">
+              <a:spcAft>
+                <a:spcPts val="400"/>
+              </a:spcAft>
+              <a:buNone/>
+            </a:pPr>
+            <a:r>
+              <a:rPr lang="en-US" sz="1400" dirty="0">
+                <a:solidFill>
+                  <a:srgbClr val="1A1A1A"/>
+                </a:solidFill>
+                <a:latin typeface="Yu Gothic UI" pitchFamily="34" charset="0"/>
+                <a:ea typeface="Yu Gothic UI" pitchFamily="34" charset="-122"/>
+                <a:cs typeface="Yu Gothic UI" pitchFamily="34" charset="-120"/>
+              </a:rPr>
+              <a:t>1. 記入例をコピペして実行 → CF表が妥当か目視、AI総評が顧客に説明できるトーンか確認</a:t>
+            </a:r>
+            <a:endParaRPr lang="en-US" sz="1400" dirty="0"/>
+          </a:p>
+          <a:p>
+            <a:pPr indent="0" marL="0">
+              <a:spcAft>
+                <a:spcPts val="400"/>
+              </a:spcAft>
+              <a:buNone/>
+            </a:pPr>
+            <a:r>
+              <a:rPr lang="en-US" sz="1400" dirty="0">
+                <a:solidFill>
+                  <a:srgbClr val="1A1A1A"/>
+                </a:solidFill>
+                <a:latin typeface="Yu Gothic UI" pitchFamily="34" charset="0"/>
+                <a:ea typeface="Yu Gothic UI" pitchFamily="34" charset="-122"/>
+                <a:cs typeface="Yu Gothic UI" pitchFamily="34" charset="-120"/>
+              </a:rPr>
+              <a:t>2. 前提テーブルの投資リターン 2.0% → 4.0% に変更 → 再実行 → 貯蓄推移が上振れすることを確認</a:t>
+            </a:r>
+            <a:endParaRPr lang="en-US" sz="1400" dirty="0"/>
+          </a:p>
+          <a:p>
+            <a:pPr indent="0" marL="0">
+              <a:spcAft>
+                <a:spcPts val="400"/>
+              </a:spcAft>
+              <a:buNone/>
+            </a:pPr>
+            <a:r>
+              <a:rPr lang="en-US" sz="1400" dirty="0">
+                <a:solidFill>
+                  <a:srgbClr val="1A1A1A"/>
+                </a:solidFill>
+                <a:latin typeface="Yu Gothic UI" pitchFamily="34" charset="0"/>
+                <a:ea typeface="Yu Gothic UI" pitchFamily="34" charset="-122"/>
+                <a:cs typeface="Yu Gothic UI" pitchFamily="34" charset="-120"/>
+              </a:rPr>
+              <a:t>3. 年収 600 → 200万に変更 → 再実行 → 破綻年が出て、総評で "対策" が提示されるか確認</a:t>
+            </a:r>
+            <a:endParaRPr lang="en-US" sz="1400" dirty="0"/>
+          </a:p>
+          <a:p>
+            <a:pPr indent="0" marL="0">
+              <a:spcAft>
+                <a:spcPts val="400"/>
+              </a:spcAft>
+              <a:buNone/>
+            </a:pPr>
+            <a:endParaRPr lang="en-US" sz="1400" dirty="0"/>
+          </a:p>
+          <a:p>
+            <a:pPr indent="0" marL="0">
+              <a:spcAft>
+                <a:spcPts val="400"/>
+              </a:spcAft>
+              <a:buNone/>
+            </a:pPr>
+            <a:r>
+              <a:rPr lang="en-US" sz="1400" dirty="0">
+                <a:solidFill>
+                  <a:srgbClr val="1A1A1A"/>
+                </a:solidFill>
+                <a:latin typeface="Yu Gothic UI" pitchFamily="34" charset="0"/>
+                <a:ea typeface="Yu Gothic UI" pitchFamily="34" charset="-122"/>
+                <a:cs typeface="Yu Gothic UI" pitchFamily="34" charset="-120"/>
+              </a:rPr>
+              <a:t>【運用ルール決定の観点】</a:t>
+            </a:r>
+            <a:endParaRPr lang="en-US" sz="1400" dirty="0"/>
+          </a:p>
+          <a:p>
+            <a:pPr indent="0" marL="0">
+              <a:spcAft>
+                <a:spcPts val="400"/>
+              </a:spcAft>
+              <a:buNone/>
+            </a:pPr>
+            <a:r>
+              <a:rPr lang="en-US" sz="1400" dirty="0">
+                <a:solidFill>
+                  <a:srgbClr val="1A1A1A"/>
+                </a:solidFill>
+                <a:latin typeface="Yu Gothic UI" pitchFamily="34" charset="0"/>
+                <a:ea typeface="Yu Gothic UI" pitchFamily="34" charset="-122"/>
+                <a:cs typeface="Yu Gothic UI" pitchFamily="34" charset="-120"/>
+              </a:rPr>
+              <a:t>- 面談中: いつ 顧客の目の前で実行するか(冒頭 or 提案時)</a:t>
+            </a:r>
+            <a:endParaRPr lang="en-US" sz="1400" dirty="0"/>
+          </a:p>
+          <a:p>
+            <a:pPr indent="0" marL="0">
+              <a:spcAft>
+                <a:spcPts val="400"/>
+              </a:spcAft>
+              <a:buNone/>
+            </a:pPr>
+            <a:r>
+              <a:rPr lang="en-US" sz="1400" dirty="0">
+                <a:solidFill>
+                  <a:srgbClr val="1A1A1A"/>
+                </a:solidFill>
+                <a:latin typeface="Yu Gothic UI" pitchFamily="34" charset="0"/>
+                <a:ea typeface="Yu Gothic UI" pitchFamily="34" charset="-122"/>
+                <a:cs typeface="Yu Gothic UI" pitchFamily="34" charset="-120"/>
+              </a:rPr>
+              <a:t>- レビュー: AI出力を 誰が どの時点でチェックするか</a:t>
+            </a:r>
+            <a:endParaRPr lang="en-US" sz="1400" dirty="0"/>
+          </a:p>
+          <a:p>
+            <a:pPr indent="0" marL="0">
+              <a:spcAft>
+                <a:spcPts val="400"/>
+              </a:spcAft>
+              <a:buNone/>
+            </a:pPr>
+            <a:r>
+              <a:rPr lang="en-US" sz="1400" dirty="0">
+                <a:solidFill>
+                  <a:srgbClr val="1A1A1A"/>
+                </a:solidFill>
+                <a:latin typeface="Yu Gothic UI" pitchFamily="34" charset="0"/>
+                <a:ea typeface="Yu Gothic UI" pitchFamily="34" charset="-122"/>
+                <a:cs typeface="Yu Gothic UI" pitchFamily="34" charset="-120"/>
+              </a:rPr>
+              <a:t>- 顧客への見せ方: CF表を直接見せる vs サマリだけ見せる</a:t>
+            </a:r>
+            <a:endParaRPr lang="en-US" sz="1400" dirty="0"/>
+          </a:p>
+          <a:p>
+            <a:pPr indent="0" marL="0">
+              <a:spcAft>
+                <a:spcPts val="400"/>
+              </a:spcAft>
+              <a:buNone/>
+            </a:pPr>
+            <a:r>
+              <a:rPr lang="en-US" sz="1400" dirty="0">
+                <a:solidFill>
+                  <a:srgbClr val="1A1A1A"/>
+                </a:solidFill>
+                <a:latin typeface="Yu Gothic UI" pitchFamily="34" charset="0"/>
+                <a:ea typeface="Yu Gothic UI" pitchFamily="34" charset="-122"/>
+                <a:cs typeface="Yu Gothic UI" pitchFamily="34" charset="-120"/>
+              </a:rPr>
+              <a:t>- 提案フックの扱い: 第15回マスタ表と照合してから提案 or その場で言及</a:t>
             </a:r>
             <a:endParaRPr lang="en-US" sz="1400" dirty="0"/>
           </a:p>
@@ -2324,27 +2542,67 @@
                 <a:ea typeface="Yu Gothic UI" pitchFamily="34" charset="-122"/>
                 <a:cs typeface="Yu Gothic UI" pitchFamily="34" charset="-120"/>
               </a:rPr>
-              <a:t>・自動整理GAS</a:t>
-            </a:r>
-            <a:endParaRPr lang="en-US" sz="1400" dirty="0"/>
-          </a:p>
-          <a:p>
-            <a:pPr indent="0" marL="0">
-              <a:spcAft>
-                <a:spcPts val="400"/>
-              </a:spcAft>
-              <a:buNone/>
-            </a:pPr>
-            <a:r>
-              <a:rPr lang="en-US" sz="1400" dirty="0">
-                <a:solidFill>
-                  <a:srgbClr val="1A1A1A"/>
-                </a:solidFill>
-                <a:latin typeface="Yu Gothic UI" pitchFamily="34" charset="0"/>
-                <a:ea typeface="Yu Gothic UI" pitchFamily="34" charset="-122"/>
-                <a:cs typeface="Yu Gothic UI" pitchFamily="34" charset="-120"/>
-              </a:rPr>
-              <a:t>・テスト回答で動作確認</a:t>
+              <a:t>・3ケースの実行結果と "気付いた点" が言語化されている</a:t>
+            </a:r>
+            <a:endParaRPr lang="en-US" sz="1400" dirty="0"/>
+          </a:p>
+          <a:p>
+            <a:pPr indent="0" marL="0">
+              <a:spcAft>
+                <a:spcPts val="400"/>
+              </a:spcAft>
+              <a:buNone/>
+            </a:pPr>
+            <a:r>
+              <a:rPr lang="en-US" sz="1400" dirty="0">
+                <a:solidFill>
+                  <a:srgbClr val="1A1A1A"/>
+                </a:solidFill>
+                <a:latin typeface="Yu Gothic UI" pitchFamily="34" charset="0"/>
+                <a:ea typeface="Yu Gothic UI" pitchFamily="34" charset="-122"/>
+                <a:cs typeface="Yu Gothic UI" pitchFamily="34" charset="-120"/>
+              </a:rPr>
+              <a:t>・数値精度の限界(累積計算の飛び値等)に気付いている</a:t>
+            </a:r>
+            <a:endParaRPr lang="en-US" sz="1400" dirty="0"/>
+          </a:p>
+          <a:p>
+            <a:pPr indent="0" marL="0">
+              <a:spcAft>
+                <a:spcPts val="400"/>
+              </a:spcAft>
+              <a:buNone/>
+            </a:pPr>
+            <a:r>
+              <a:rPr lang="en-US" sz="1400" dirty="0">
+                <a:solidFill>
+                  <a:srgbClr val="1A1A1A"/>
+                </a:solidFill>
+                <a:latin typeface="Yu Gothic UI" pitchFamily="34" charset="0"/>
+                <a:ea typeface="Yu Gothic UI" pitchFamily="34" charset="-122"/>
+                <a:cs typeface="Yu Gothic UI" pitchFamily="34" charset="-120"/>
+              </a:rPr>
+              <a:t>・前提変更の影響を顧客に説明する言い回しが決まっている</a:t>
+            </a:r>
+            <a:endParaRPr lang="en-US" sz="1400" dirty="0"/>
+          </a:p>
+          <a:p>
+            <a:pPr indent="0" marL="0">
+              <a:spcAft>
+                <a:spcPts val="400"/>
+              </a:spcAft>
+              <a:buNone/>
+            </a:pPr>
+            <a:r>
+              <a:rPr lang="en-US" sz="1400" dirty="0">
+                <a:solidFill>
+                  <a:srgbClr val="1A1A1A"/>
+                </a:solidFill>
+                <a:latin typeface="Yu Gothic UI" pitchFamily="34" charset="0"/>
+                <a:ea typeface="Yu Gothic UI" pitchFamily="34" charset="-122"/>
+                <a:cs typeface="Yu Gothic UI" pitchFamily="34" charset="-120"/>
+              </a:rPr>
+              <a:t>・運用ルール(いつ・誰が・どう使う)が スプシに書き残されている</a:t>
             </a:r>
             <a:endParaRPr lang="en-US" sz="1400" dirty="0"/>
           </a:p>
@@ -2472,47 +2730,67 @@
                 <a:ea typeface="Yu Gothic UI" pitchFamily="34" charset="-122"/>
                 <a:cs typeface="Yu Gothic UI" pitchFamily="34" charset="-120"/>
               </a:rPr>
-              <a:t>・onFormSubmit トリガー設定を忘れない。コードだけでは動かない。</a:t>
-            </a:r>
-            <a:endParaRPr lang="en-US" sz="1400" dirty="0"/>
-          </a:p>
-          <a:p>
-            <a:pPr indent="0" marL="0">
-              <a:spcAft>
-                <a:spcPts val="400"/>
-              </a:spcAft>
-              <a:buNone/>
-            </a:pPr>
-            <a:r>
-              <a:rPr lang="en-US" sz="1400" dirty="0">
-                <a:solidFill>
-                  <a:srgbClr val="1A1A1A"/>
-                </a:solidFill>
-                <a:latin typeface="Yu Gothic UI" pitchFamily="34" charset="0"/>
-                <a:ea typeface="Yu Gothic UI" pitchFamily="34" charset="-122"/>
-                <a:cs typeface="Yu Gothic UI" pitchFamily="34" charset="-120"/>
-              </a:rPr>
-              <a:t>・重複チェックは氏名+メール の両方一致を推奨。氏名だけは同名で誤動作。</a:t>
-            </a:r>
-            <a:endParaRPr lang="en-US" sz="1400" dirty="0"/>
-          </a:p>
-          <a:p>
-            <a:pPr indent="0" marL="0">
-              <a:spcAft>
-                <a:spcPts val="400"/>
-              </a:spcAft>
-              <a:buNone/>
-            </a:pPr>
-            <a:r>
-              <a:rPr lang="en-US" sz="1400" dirty="0">
-                <a:solidFill>
-                  <a:srgbClr val="1A1A1A"/>
-                </a:solidFill>
-                <a:latin typeface="Yu Gothic UI" pitchFamily="34" charset="0"/>
-                <a:ea typeface="Yu Gothic UI" pitchFamily="34" charset="-122"/>
-                <a:cs typeface="Yu Gothic UI" pitchFamily="34" charset="-120"/>
-              </a:rPr>
-              <a:t>・テスト回答前にプレビューで全項目入力確認。</a:t>
+              <a:t>・「AI出力を そのまま顧客に見せない」を必ず徹底。レビュー工程を運用ルールに明記。</a:t>
+            </a:r>
+            <a:endParaRPr lang="en-US" sz="1400" dirty="0"/>
+          </a:p>
+          <a:p>
+            <a:pPr indent="0" marL="0">
+              <a:spcAft>
+                <a:spcPts val="400"/>
+              </a:spcAft>
+              <a:buNone/>
+            </a:pPr>
+            <a:r>
+              <a:rPr lang="en-US" sz="1400" dirty="0">
+                <a:solidFill>
+                  <a:srgbClr val="1A1A1A"/>
+                </a:solidFill>
+                <a:latin typeface="Yu Gothic UI" pitchFamily="34" charset="0"/>
+                <a:ea typeface="Yu Gothic UI" pitchFamily="34" charset="-122"/>
+                <a:cs typeface="Yu Gothic UI" pitchFamily="34" charset="-120"/>
+              </a:rPr>
+              <a:t>・破綻年は "危機感煽り" にならないよう慎重に。「対策を一緒に考えるための材料」トーンで。</a:t>
+            </a:r>
+            <a:endParaRPr lang="en-US" sz="1400" dirty="0"/>
+          </a:p>
+          <a:p>
+            <a:pPr indent="0" marL="0">
+              <a:spcAft>
+                <a:spcPts val="400"/>
+              </a:spcAft>
+              <a:buNone/>
+            </a:pPr>
+            <a:r>
+              <a:rPr lang="en-US" sz="1400" dirty="0">
+                <a:solidFill>
+                  <a:srgbClr val="1A1A1A"/>
+                </a:solidFill>
+                <a:latin typeface="Yu Gothic UI" pitchFamily="34" charset="0"/>
+                <a:ea typeface="Yu Gothic UI" pitchFamily="34" charset="-122"/>
+                <a:cs typeface="Yu Gothic UI" pitchFamily="34" charset="-120"/>
+              </a:rPr>
+              <a:t>・第15回マスタ表を扱った生徒には、提案フック → マスタ表引当 の実演を勧める。</a:t>
+            </a:r>
+            <a:endParaRPr lang="en-US" sz="1400" dirty="0"/>
+          </a:p>
+          <a:p>
+            <a:pPr indent="0" marL="0">
+              <a:spcAft>
+                <a:spcPts val="400"/>
+              </a:spcAft>
+              <a:buNone/>
+            </a:pPr>
+            <a:r>
+              <a:rPr lang="en-US" sz="1400" dirty="0">
+                <a:solidFill>
+                  <a:srgbClr val="1A1A1A"/>
+                </a:solidFill>
+                <a:latin typeface="Yu Gothic UI" pitchFamily="34" charset="0"/>
+                <a:ea typeface="Yu Gothic UI" pitchFamily="34" charset="-122"/>
+                <a:cs typeface="Yu Gothic UI" pitchFamily="34" charset="-120"/>
+              </a:rPr>
+              <a:t>・生徒がツールを "現場でどう使うか" 具体的に想像できているかを最後の口頭確認で。</a:t>
             </a:r>
             <a:endParaRPr lang="en-US" sz="1400" dirty="0"/>
           </a:p>
